--- a/public/pitch-deck.pptx
+++ b/public/pitch-deck.pptx
@@ -1807,7 +1807,7 @@
                 <a:ea typeface="Georgia" pitchFamily="34" charset="-122"/>
                 <a:cs typeface="Georgia" pitchFamily="34" charset="-120"/>
               </a:rPr>
-              <a:t>Your meeting,</a:t>
+              <a:t>Your thoughts,</a:t>
             </a:r>
             <a:endParaRPr lang="en-US" sz="6400" dirty="0"/>
           </a:p>
@@ -1839,7 +1839,7 @@
         <p:spPr>
           <a:xfrm>
             <a:off x="548640" y="3611880"/>
-            <a:ext cx="7132320" cy="640080"/>
+            <a:ext cx="7772400" cy="731520"/>
           </a:xfrm>
           <a:prstGeom prst="rect">
             <a:avLst/>
@@ -1863,7 +1863,7 @@
                 <a:ea typeface="Helvetica Neue" pitchFamily="34" charset="-122"/>
                 <a:cs typeface="Helvetica Neue" pitchFamily="34" charset="-120"/>
               </a:rPr>
-              <a:t>A voice-driven canvas that turns meetings into structured documents — live. Then keeps shaping itself by voice or chat.</a:t>
+              <a:t>Talk through anything you're chewing on — a decision, a plan, a problem. The canvas listens and turns what you say into typed cards you can keep refining by voice or chat.</a:t>
             </a:r>
             <a:endParaRPr lang="en-US" sz="1400" dirty="0"/>
           </a:p>
@@ -2537,7 +2537,7 @@
                 <a:ea typeface="Georgia" pitchFamily="34" charset="-122"/>
                 <a:cs typeface="Georgia" pitchFamily="34" charset="-120"/>
               </a:rPr>
-              <a:t>Meetings end. The work disappears.</a:t>
+              <a:t>You talk it through. Then it's gone.</a:t>
             </a:r>
             <a:endParaRPr lang="en-US" sz="4000" dirty="0"/>
           </a:p>
@@ -2596,7 +2596,7 @@
                 <a:ea typeface="Georgia" pitchFamily="34" charset="-122"/>
                 <a:cs typeface="Georgia" pitchFamily="34" charset="-120"/>
               </a:rPr>
-              <a:t>“Wait — what did we decide about pricing last week?”</a:t>
+              <a:t>“Wait — what was the angle I had on this last week?”</a:t>
             </a:r>
             <a:endParaRPr lang="en-US" sz="1800" dirty="0"/>
           </a:p>
@@ -2635,7 +2635,7 @@
                 <a:ea typeface="Consolas" pitchFamily="34" charset="-122"/>
                 <a:cs typeface="Consolas" pitchFamily="34" charset="-120"/>
               </a:rPr>
-              <a:t>— A SLACK THREAD, WEDNESDAY 4:42PM</a:t>
+              <a:t>— A TUESDAY MORNING · TRYING TO REMEMBER</a:t>
             </a:r>
             <a:endParaRPr lang="en-US" sz="800" dirty="0"/>
           </a:p>
@@ -2694,7 +2694,7 @@
                 <a:ea typeface="Georgia" pitchFamily="34" charset="-122"/>
                 <a:cs typeface="Georgia" pitchFamily="34" charset="-120"/>
               </a:rPr>
-              <a:t>“I thought Alex was going to own it? Or was it Sam?”</a:t>
+              <a:t>“I had the whole plan in my head an hour ago.”</a:t>
             </a:r>
             <a:endParaRPr lang="en-US" sz="1800" dirty="0"/>
           </a:p>
@@ -2733,7 +2733,7 @@
                 <a:ea typeface="Consolas" pitchFamily="34" charset="-122"/>
                 <a:cs typeface="Consolas" pitchFamily="34" charset="-120"/>
               </a:rPr>
-              <a:t>— A STANDUP, TWO SPRINTS LATER</a:t>
+              <a:t>— A BLANK NOTION PAGE · CURSOR BLINKING</a:t>
             </a:r>
             <a:endParaRPr lang="en-US" sz="800" dirty="0"/>
           </a:p>
@@ -2792,7 +2792,7 @@
                 <a:ea typeface="Georgia" pitchFamily="34" charset="-122"/>
                 <a:cs typeface="Georgia" pitchFamily="34" charset="-120"/>
               </a:rPr>
-              <a:t>“There's a recording but it's 47 minutes long. Anyone want to listen back?”</a:t>
+              <a:t>“Voice memos again? I'll never re-listen to those.”</a:t>
             </a:r>
             <a:endParaRPr lang="en-US" sz="1800" dirty="0"/>
           </a:p>
@@ -3101,7 +3101,7 @@
                 <a:ea typeface="Georgia" pitchFamily="34" charset="-122"/>
                 <a:cs typeface="Georgia" pitchFamily="34" charset="-120"/>
               </a:rPr>
-              <a:t>Existing meeting tools fall into three buckets.</a:t>
+              <a:t>Existing tools fall into three buckets.</a:t>
             </a:r>
             <a:endParaRPr lang="en-US" sz="3200" dirty="0"/>
           </a:p>
@@ -3140,7 +3140,7 @@
                 <a:ea typeface="Helvetica Neue" pitchFamily="34" charset="-122"/>
                 <a:cs typeface="Helvetica Neue" pitchFamily="34" charset="-120"/>
               </a:rPr>
-              <a:t>None of them produce the document you actually wanted.</a:t>
+              <a:t>None of them produce the artifact you actually wanted.</a:t>
             </a:r>
             <a:endParaRPr lang="en-US" sz="1400" dirty="0"/>
           </a:p>
@@ -3204,7 +3204,7 @@
                 <a:ea typeface="Consolas" pitchFamily="34" charset="-122"/>
                 <a:cs typeface="Consolas" pitchFamily="34" charset="-120"/>
               </a:rPr>
-              <a:t>RECORDERS</a:t>
+              <a:t>VOICE MEMOS</a:t>
             </a:r>
             <a:endParaRPr lang="en-US" sz="900" dirty="0"/>
           </a:p>
@@ -3243,7 +3243,7 @@
                 <a:ea typeface="Georgia" pitchFamily="34" charset="-122"/>
                 <a:cs typeface="Georgia" pitchFamily="34" charset="-120"/>
               </a:rPr>
-              <a:t>Hours of audio.</a:t>
+              <a:t>Audio you record.</a:t>
             </a:r>
             <a:endParaRPr lang="en-US" sz="2000" dirty="0"/>
           </a:p>
@@ -3282,7 +3282,7 @@
                 <a:ea typeface="Helvetica Neue" pitchFamily="34" charset="-122"/>
                 <a:cs typeface="Helvetica Neue" pitchFamily="34" charset="-120"/>
               </a:rPr>
-              <a:t>You'll never re-listen.</a:t>
+              <a:t>You'll never replay it.</a:t>
             </a:r>
             <a:endParaRPr lang="en-US" sz="1200" dirty="0"/>
           </a:p>
@@ -3488,7 +3488,7 @@
                 <a:ea typeface="Consolas" pitchFamily="34" charset="-122"/>
                 <a:cs typeface="Consolas" pitchFamily="34" charset="-120"/>
               </a:rPr>
-              <a:t>AI SUMMARIES</a:t>
+              <a:t>CHAT WITH AN AI</a:t>
             </a:r>
             <a:endParaRPr lang="en-US" sz="900" dirty="0"/>
           </a:p>
@@ -3527,7 +3527,7 @@
                 <a:ea typeface="Georgia" pitchFamily="34" charset="-122"/>
                 <a:cs typeface="Georgia" pitchFamily="34" charset="-120"/>
               </a:rPr>
-              <a:t>A paragraph or two.</a:t>
+              <a:t>A scrolling log.</a:t>
             </a:r>
             <a:endParaRPr lang="en-US" sz="2000" dirty="0"/>
           </a:p>
@@ -4864,7 +4864,7 @@
                 <a:ea typeface="Helvetica Neue" pitchFamily="34" charset="-122"/>
                 <a:cs typeface="Helvetica Neue" pitchFamily="34" charset="-120"/>
               </a:rPr>
-              <a:t>Open a canvas, hit listen, run your meeting. No tags, no formats, no special prompts.</a:t>
+              <a:t>Start a canvas, hit listen, think out loud. No tags, no formats, no special prompts.</a:t>
             </a:r>
             <a:endParaRPr lang="en-US" sz="1100" dirty="0"/>
           </a:p>
@@ -6079,7 +6079,7 @@
                 <a:ea typeface="Georgia" pitchFamily="34" charset="-122"/>
                 <a:cs typeface="Georgia" pitchFamily="34" charset="-120"/>
               </a:rPr>
-              <a:t>Two minutes. One auth design decision.</a:t>
+              <a:t>Two minutes. One thought, worked through.</a:t>
             </a:r>
             <a:endParaRPr lang="en-US" sz="3600" dirty="0"/>
           </a:p>
